--- a/ゲーム科1年/01_後期/プログラミングⅢ/15_これまでの課題.pptx
+++ b/ゲーム科1年/01_後期/プログラミングⅢ/15_これまでの課題.pptx
@@ -266,7 +266,7 @@
           <a:p>
             <a:fld id="{E9CC885B-4903-4D54-9A93-00025F12DED9}" type="datetimeFigureOut">
               <a:rPr kumimoji="1" lang="ja-JP" altLang="en-US" smtClean="0"/>
-              <a:t>2024/11/12</a:t>
+              <a:t>2025/3/3</a:t>
             </a:fld>
             <a:endParaRPr kumimoji="1" lang="ja-JP" altLang="en-US"/>
           </a:p>
@@ -496,7 +496,7 @@
           <a:p>
             <a:fld id="{E9CC885B-4903-4D54-9A93-00025F12DED9}" type="datetimeFigureOut">
               <a:rPr kumimoji="1" lang="ja-JP" altLang="en-US" smtClean="0"/>
-              <a:t>2024/11/12</a:t>
+              <a:t>2025/3/3</a:t>
             </a:fld>
             <a:endParaRPr kumimoji="1" lang="ja-JP" altLang="en-US"/>
           </a:p>
@@ -736,7 +736,7 @@
           <a:p>
             <a:fld id="{E9CC885B-4903-4D54-9A93-00025F12DED9}" type="datetimeFigureOut">
               <a:rPr kumimoji="1" lang="ja-JP" altLang="en-US" smtClean="0"/>
-              <a:t>2024/11/12</a:t>
+              <a:t>2025/3/3</a:t>
             </a:fld>
             <a:endParaRPr kumimoji="1" lang="ja-JP" altLang="en-US"/>
           </a:p>
@@ -966,7 +966,7 @@
           <a:p>
             <a:fld id="{E9CC885B-4903-4D54-9A93-00025F12DED9}" type="datetimeFigureOut">
               <a:rPr kumimoji="1" lang="ja-JP" altLang="en-US" smtClean="0"/>
-              <a:t>2024/11/12</a:t>
+              <a:t>2025/3/3</a:t>
             </a:fld>
             <a:endParaRPr kumimoji="1" lang="ja-JP" altLang="en-US"/>
           </a:p>
@@ -1241,7 +1241,7 @@
           <a:p>
             <a:fld id="{E9CC885B-4903-4D54-9A93-00025F12DED9}" type="datetimeFigureOut">
               <a:rPr kumimoji="1" lang="ja-JP" altLang="en-US" smtClean="0"/>
-              <a:t>2024/11/12</a:t>
+              <a:t>2025/3/3</a:t>
             </a:fld>
             <a:endParaRPr kumimoji="1" lang="ja-JP" altLang="en-US"/>
           </a:p>
@@ -1570,7 +1570,7 @@
           <a:p>
             <a:fld id="{E9CC885B-4903-4D54-9A93-00025F12DED9}" type="datetimeFigureOut">
               <a:rPr kumimoji="1" lang="ja-JP" altLang="en-US" smtClean="0"/>
-              <a:t>2024/11/12</a:t>
+              <a:t>2025/3/3</a:t>
             </a:fld>
             <a:endParaRPr kumimoji="1" lang="ja-JP" altLang="en-US"/>
           </a:p>
@@ -2046,7 +2046,7 @@
           <a:p>
             <a:fld id="{E9CC885B-4903-4D54-9A93-00025F12DED9}" type="datetimeFigureOut">
               <a:rPr kumimoji="1" lang="ja-JP" altLang="en-US" smtClean="0"/>
-              <a:t>2024/11/12</a:t>
+              <a:t>2025/3/3</a:t>
             </a:fld>
             <a:endParaRPr kumimoji="1" lang="ja-JP" altLang="en-US"/>
           </a:p>
@@ -2187,7 +2187,7 @@
           <a:p>
             <a:fld id="{E9CC885B-4903-4D54-9A93-00025F12DED9}" type="datetimeFigureOut">
               <a:rPr kumimoji="1" lang="ja-JP" altLang="en-US" smtClean="0"/>
-              <a:t>2024/11/12</a:t>
+              <a:t>2025/3/3</a:t>
             </a:fld>
             <a:endParaRPr kumimoji="1" lang="ja-JP" altLang="en-US"/>
           </a:p>
@@ -2300,7 +2300,7 @@
           <a:p>
             <a:fld id="{E9CC885B-4903-4D54-9A93-00025F12DED9}" type="datetimeFigureOut">
               <a:rPr kumimoji="1" lang="ja-JP" altLang="en-US" smtClean="0"/>
-              <a:t>2024/11/12</a:t>
+              <a:t>2025/3/3</a:t>
             </a:fld>
             <a:endParaRPr kumimoji="1" lang="ja-JP" altLang="en-US"/>
           </a:p>
@@ -2643,7 +2643,7 @@
           <a:p>
             <a:fld id="{E9CC885B-4903-4D54-9A93-00025F12DED9}" type="datetimeFigureOut">
               <a:rPr kumimoji="1" lang="ja-JP" altLang="en-US" smtClean="0"/>
-              <a:t>2024/11/12</a:t>
+              <a:t>2025/3/3</a:t>
             </a:fld>
             <a:endParaRPr kumimoji="1" lang="ja-JP" altLang="en-US"/>
           </a:p>
@@ -2931,7 +2931,7 @@
           <a:p>
             <a:fld id="{E9CC885B-4903-4D54-9A93-00025F12DED9}" type="datetimeFigureOut">
               <a:rPr kumimoji="1" lang="ja-JP" altLang="en-US" smtClean="0"/>
-              <a:t>2024/11/12</a:t>
+              <a:t>2025/3/3</a:t>
             </a:fld>
             <a:endParaRPr kumimoji="1" lang="ja-JP" altLang="en-US"/>
           </a:p>
@@ -3204,7 +3204,7 @@
           <a:p>
             <a:fld id="{E9CC885B-4903-4D54-9A93-00025F12DED9}" type="datetimeFigureOut">
               <a:rPr kumimoji="1" lang="ja-JP" altLang="en-US" smtClean="0"/>
-              <a:t>2024/11/12</a:t>
+              <a:t>2025/3/3</a:t>
             </a:fld>
             <a:endParaRPr kumimoji="1" lang="ja-JP" altLang="en-US"/>
           </a:p>
@@ -5374,7 +5374,11 @@
               <a:t>・まずは基底クラスとなる</a:t>
             </a:r>
             <a:r>
-              <a:rPr lang="en-US" altLang="ja-JP" sz="2400" dirty="0"/>
+              <a:rPr lang="en-US" altLang="ja-JP" sz="2400" b="1" dirty="0">
+                <a:solidFill>
+                  <a:srgbClr val="00B050"/>
+                </a:solidFill>
+              </a:rPr>
               <a:t>Character</a:t>
             </a:r>
             <a:r>
@@ -5396,7 +5400,11 @@
               <a:t>　（クラスの仕様にない機能の処理は</a:t>
             </a:r>
             <a:r>
-              <a:rPr lang="en-US" altLang="ja-JP" sz="2400" dirty="0"/>
+              <a:rPr lang="en-US" altLang="ja-JP" sz="2400" b="1" dirty="0">
+                <a:solidFill>
+                  <a:srgbClr val="FF0000"/>
+                </a:solidFill>
+              </a:rPr>
               <a:t>Main.cpp</a:t>
             </a:r>
             <a:r>
